--- a/examples/EVM1110E_W08/EVM1110E_W08_KAM_Governance_Measurement.pptx
+++ b/examples/EVM1110E_W08/EVM1110E_W08_KAM_Governance_Measurement.pptx
@@ -531,7 +531,7 @@
           <a:p>
             <a:r>
               <a:rPr lang="en-US" dirty="0"/>
-              <a:t>Slide 1 (dàn ý #1). Điền tên giảng viên trước khi dạy.
+              <a:t>Slide 1 (dàn ý #1).
 Alt-text: hình kim cương, bên trái là nhóm người của agency, bên phải là nhóm người của Key Account, nối với nhau bằng năm đường song song.</a:t>
             </a:r>
             <a:endParaRPr lang="en-US" dirty="0"/>
@@ -4476,7 +4476,7 @@
                 <a:ea typeface="Alexandria" pitchFamily="34" charset="-122"/>
                 <a:cs typeface="Alexandria" pitchFamily="34" charset="-120"/>
               </a:rPr>
-              <a:t>Giảng viên: [Tên giảng viên]</a:t>
+              <a:t>Giảng viên: Đoàn Nguyễn Bảo Quyên</a:t>
             </a:r>
             <a:endParaRPr lang="en-US" sz="1500" dirty="0"/>
           </a:p>
